--- a/構成図.pptx
+++ b/構成図.pptx
@@ -13,10 +13,11 @@
     <p:sldMasterId id="2147483819" r:id="rId9"/>
   </p:sldMasterIdLst>
   <p:notesMasterIdLst>
-    <p:notesMasterId r:id="rId11"/>
+    <p:notesMasterId r:id="rId12"/>
   </p:notesMasterIdLst>
   <p:sldIdLst>
-    <p:sldId id="256" r:id="rId10"/>
+    <p:sldId id="257" r:id="rId10"/>
+    <p:sldId id="256" r:id="rId11"/>
   </p:sldIdLst>
   <p:sldSz cx="24382413" cy="13716000"/>
   <p:notesSz cx="6858000" cy="9144000"/>
@@ -181,7 +182,7 @@
 <file path=ppt/revisionInfo.xml><?xml version="1.0" encoding="utf-8"?>
 <p1510:revInfo xmlns:a="http://schemas.openxmlformats.org/drawingml/2006/main" xmlns:r="http://schemas.openxmlformats.org/officeDocument/2006/relationships" xmlns:p1510="http://schemas.microsoft.com/office/powerpoint/2015/10/main">
   <p1510:revLst>
-    <p1510:client id="{E40ED1AF-0701-4A81-8C7F-0DDC830A253F}" v="1" dt="2026-05-27T07:26:54.810"/>
+    <p1510:client id="{E40ED1AF-0701-4A81-8C7F-0DDC830A253F}" v="3" dt="2026-05-27T10:20:06.562"/>
   </p1510:revLst>
 </p1510:revInfo>
 </file>
@@ -190,17 +191,145 @@
 <pc:chgInfo xmlns:a="http://schemas.openxmlformats.org/drawingml/2006/main" xmlns:r="http://schemas.openxmlformats.org/officeDocument/2006/relationships" xmlns:ac="http://schemas.microsoft.com/office/drawing/2013/main/command" xmlns:pc="http://schemas.microsoft.com/office/powerpoint/2013/main/command">
   <pc:docChgLst>
     <pc:chgData name="城谷 匠" userId="afbae57c-d4ca-4e58-bc9a-6f765e208d89" providerId="ADAL" clId="{FD963559-32B2-43B7-8F97-A1E47AC731FA}"/>
-    <pc:docChg chg="modSld">
-      <pc:chgData name="城谷 匠" userId="afbae57c-d4ca-4e58-bc9a-6f765e208d89" providerId="ADAL" clId="{FD963559-32B2-43B7-8F97-A1E47AC731FA}" dt="2026-05-27T07:26:54.810" v="0"/>
+    <pc:docChg chg="custSel addSld modSld sldOrd">
+      <pc:chgData name="城谷 匠" userId="afbae57c-d4ca-4e58-bc9a-6f765e208d89" providerId="ADAL" clId="{FD963559-32B2-43B7-8F97-A1E47AC731FA}" dt="2026-05-27T10:20:06.560" v="108" actId="164"/>
       <pc:docMkLst>
         <pc:docMk/>
       </pc:docMkLst>
-      <pc:sldChg chg="modSp">
-        <pc:chgData name="城谷 匠" userId="afbae57c-d4ca-4e58-bc9a-6f765e208d89" providerId="ADAL" clId="{FD963559-32B2-43B7-8F97-A1E47AC731FA}" dt="2026-05-27T07:26:54.810" v="0"/>
+      <pc:sldChg chg="addSp delSp modSp mod">
+        <pc:chgData name="城谷 匠" userId="afbae57c-d4ca-4e58-bc9a-6f765e208d89" providerId="ADAL" clId="{FD963559-32B2-43B7-8F97-A1E47AC731FA}" dt="2026-05-27T10:20:06.560" v="108" actId="164"/>
         <pc:sldMkLst>
           <pc:docMk/>
           <pc:sldMk cId="303347138" sldId="256"/>
         </pc:sldMkLst>
+        <pc:spChg chg="mod topLvl">
+          <ac:chgData name="城谷 匠" userId="afbae57c-d4ca-4e58-bc9a-6f765e208d89" providerId="ADAL" clId="{FD963559-32B2-43B7-8F97-A1E47AC731FA}" dt="2026-05-27T10:20:06.560" v="108" actId="164"/>
+          <ac:spMkLst>
+            <pc:docMk/>
+            <pc:sldMk cId="303347138" sldId="256"/>
+            <ac:spMk id="18" creationId="{8B343D41-767F-7149-5F1C-B1A58973CC5A}"/>
+          </ac:spMkLst>
+        </pc:spChg>
+        <pc:spChg chg="mod topLvl">
+          <ac:chgData name="城谷 匠" userId="afbae57c-d4ca-4e58-bc9a-6f765e208d89" providerId="ADAL" clId="{FD963559-32B2-43B7-8F97-A1E47AC731FA}" dt="2026-05-27T10:20:06.560" v="108" actId="164"/>
+          <ac:spMkLst>
+            <pc:docMk/>
+            <pc:sldMk cId="303347138" sldId="256"/>
+            <ac:spMk id="19" creationId="{AC8BEC35-7B9A-E7C7-3770-6CAEE40A9026}"/>
+          </ac:spMkLst>
+        </pc:spChg>
+        <pc:spChg chg="mod topLvl">
+          <ac:chgData name="城谷 匠" userId="afbae57c-d4ca-4e58-bc9a-6f765e208d89" providerId="ADAL" clId="{FD963559-32B2-43B7-8F97-A1E47AC731FA}" dt="2026-05-27T10:20:06.560" v="108" actId="164"/>
+          <ac:spMkLst>
+            <pc:docMk/>
+            <pc:sldMk cId="303347138" sldId="256"/>
+            <ac:spMk id="20" creationId="{20BB327F-29F2-275F-2820-AB5C12765EE1}"/>
+          </ac:spMkLst>
+        </pc:spChg>
+        <pc:spChg chg="mod topLvl">
+          <ac:chgData name="城谷 匠" userId="afbae57c-d4ca-4e58-bc9a-6f765e208d89" providerId="ADAL" clId="{FD963559-32B2-43B7-8F97-A1E47AC731FA}" dt="2026-05-27T10:20:06.560" v="108" actId="164"/>
+          <ac:spMkLst>
+            <pc:docMk/>
+            <pc:sldMk cId="303347138" sldId="256"/>
+            <ac:spMk id="21" creationId="{22478BDA-70BE-1B30-69E4-F5B33F41DDF9}"/>
+          </ac:spMkLst>
+        </pc:spChg>
+        <pc:spChg chg="mod topLvl">
+          <ac:chgData name="城谷 匠" userId="afbae57c-d4ca-4e58-bc9a-6f765e208d89" providerId="ADAL" clId="{FD963559-32B2-43B7-8F97-A1E47AC731FA}" dt="2026-05-27T10:20:06.560" v="108" actId="164"/>
+          <ac:spMkLst>
+            <pc:docMk/>
+            <pc:sldMk cId="303347138" sldId="256"/>
+            <ac:spMk id="51" creationId="{AA1E5E68-4974-9CFE-A8D8-E6E70C24DADE}"/>
+          </ac:spMkLst>
+        </pc:spChg>
+        <pc:picChg chg="add mod">
+          <ac:chgData name="城谷 匠" userId="afbae57c-d4ca-4e58-bc9a-6f765e208d89" providerId="ADAL" clId="{FD963559-32B2-43B7-8F97-A1E47AC731FA}" dt="2026-05-27T10:19:21.861" v="96" actId="1076"/>
+          <ac:picMkLst>
+            <pc:docMk/>
+            <pc:sldMk cId="303347138" sldId="256"/>
+            <ac:picMk id="4" creationId="{9F7FB5C9-646D-24C3-F89C-E0724B2A0E54}"/>
+          </ac:picMkLst>
+        </pc:picChg>
+        <pc:picChg chg="del">
+          <ac:chgData name="城谷 匠" userId="afbae57c-d4ca-4e58-bc9a-6f765e208d89" providerId="ADAL" clId="{FD963559-32B2-43B7-8F97-A1E47AC731FA}" dt="2026-05-27T10:19:15.006" v="95" actId="478"/>
+          <ac:picMkLst>
+            <pc:docMk/>
+            <pc:sldMk cId="303347138" sldId="256"/>
+            <ac:picMk id="5" creationId="{C8EBA0E5-D1C8-7D5F-D777-BDC1D6523F52}"/>
+          </ac:picMkLst>
+        </pc:picChg>
+        <pc:picChg chg="mod topLvl">
+          <ac:chgData name="城谷 匠" userId="afbae57c-d4ca-4e58-bc9a-6f765e208d89" providerId="ADAL" clId="{FD963559-32B2-43B7-8F97-A1E47AC731FA}" dt="2026-05-27T10:20:06.560" v="108" actId="164"/>
+          <ac:picMkLst>
+            <pc:docMk/>
+            <pc:sldMk cId="303347138" sldId="256"/>
+            <ac:picMk id="9" creationId="{56101BC6-E290-B6C6-8B4B-1FE7EC964DD1}"/>
+          </ac:picMkLst>
+        </pc:picChg>
+        <pc:picChg chg="add del mod">
+          <ac:chgData name="城谷 匠" userId="afbae57c-d4ca-4e58-bc9a-6f765e208d89" providerId="ADAL" clId="{FD963559-32B2-43B7-8F97-A1E47AC731FA}" dt="2026-05-27T10:19:38.367" v="101" actId="478"/>
+          <ac:picMkLst>
+            <pc:docMk/>
+            <pc:sldMk cId="303347138" sldId="256"/>
+            <ac:picMk id="10" creationId="{56C69E5C-0073-5490-0E93-1635BCF50770}"/>
+          </ac:picMkLst>
+        </pc:picChg>
+        <pc:picChg chg="add del mod">
+          <ac:chgData name="城谷 匠" userId="afbae57c-d4ca-4e58-bc9a-6f765e208d89" providerId="ADAL" clId="{FD963559-32B2-43B7-8F97-A1E47AC731FA}" dt="2026-05-27T10:19:51.591" v="104" actId="478"/>
+          <ac:picMkLst>
+            <pc:docMk/>
+            <pc:sldMk cId="303347138" sldId="256"/>
+            <ac:picMk id="12" creationId="{40EE86C3-235E-78C2-3E26-AF2C334434F7}"/>
+          </ac:picMkLst>
+        </pc:picChg>
+        <pc:picChg chg="add del mod">
+          <ac:chgData name="城谷 匠" userId="afbae57c-d4ca-4e58-bc9a-6f765e208d89" providerId="ADAL" clId="{FD963559-32B2-43B7-8F97-A1E47AC731FA}" dt="2026-05-27T10:20:01.332" v="107" actId="478"/>
+          <ac:picMkLst>
+            <pc:docMk/>
+            <pc:sldMk cId="303347138" sldId="256"/>
+            <ac:picMk id="14" creationId="{E28E20D3-D9DC-4A88-A01D-C4F476923071}"/>
+          </ac:picMkLst>
+        </pc:picChg>
+        <pc:picChg chg="mod topLvl">
+          <ac:chgData name="城谷 匠" userId="afbae57c-d4ca-4e58-bc9a-6f765e208d89" providerId="ADAL" clId="{FD963559-32B2-43B7-8F97-A1E47AC731FA}" dt="2026-05-27T10:20:06.560" v="108" actId="164"/>
+          <ac:picMkLst>
+            <pc:docMk/>
+            <pc:sldMk cId="303347138" sldId="256"/>
+            <ac:picMk id="15" creationId="{A1F98E5E-4BA8-EFF5-0B0F-8FBAFEFE027D}"/>
+          </ac:picMkLst>
+        </pc:picChg>
+        <pc:picChg chg="mod topLvl">
+          <ac:chgData name="城谷 匠" userId="afbae57c-d4ca-4e58-bc9a-6f765e208d89" providerId="ADAL" clId="{FD963559-32B2-43B7-8F97-A1E47AC731FA}" dt="2026-05-27T10:20:06.560" v="108" actId="164"/>
+          <ac:picMkLst>
+            <pc:docMk/>
+            <pc:sldMk cId="303347138" sldId="256"/>
+            <ac:picMk id="17" creationId="{1515A385-56AD-D4BB-2BD4-7453FE17478B}"/>
+          </ac:picMkLst>
+        </pc:picChg>
+        <pc:picChg chg="mod topLvl">
+          <ac:chgData name="城谷 匠" userId="afbae57c-d4ca-4e58-bc9a-6f765e208d89" providerId="ADAL" clId="{FD963559-32B2-43B7-8F97-A1E47AC731FA}" dt="2026-05-27T10:20:06.560" v="108" actId="164"/>
+          <ac:picMkLst>
+            <pc:docMk/>
+            <pc:sldMk cId="303347138" sldId="256"/>
+            <ac:picMk id="23" creationId="{66F7D680-994F-80EA-2660-AC0D9FAD446F}"/>
+          </ac:picMkLst>
+        </pc:picChg>
+        <pc:picChg chg="mod topLvl">
+          <ac:chgData name="城谷 匠" userId="afbae57c-d4ca-4e58-bc9a-6f765e208d89" providerId="ADAL" clId="{FD963559-32B2-43B7-8F97-A1E47AC731FA}" dt="2026-05-27T10:20:06.560" v="108" actId="164"/>
+          <ac:picMkLst>
+            <pc:docMk/>
+            <pc:sldMk cId="303347138" sldId="256"/>
+            <ac:picMk id="46" creationId="{0FE872DC-E8D1-2F34-607A-C2B11F899FBA}"/>
+          </ac:picMkLst>
+        </pc:picChg>
+        <pc:cxnChg chg="mod">
+          <ac:chgData name="城谷 匠" userId="afbae57c-d4ca-4e58-bc9a-6f765e208d89" providerId="ADAL" clId="{FD963559-32B2-43B7-8F97-A1E47AC731FA}" dt="2026-05-27T10:19:23.845" v="97" actId="14100"/>
+          <ac:cxnSpMkLst>
+            <pc:docMk/>
+            <pc:sldMk cId="303347138" sldId="256"/>
+            <ac:cxnSpMk id="25" creationId="{D1511AFF-534E-50AC-E7F1-5960FCCF2DC1}"/>
+          </ac:cxnSpMkLst>
+        </pc:cxnChg>
         <pc:cxnChg chg="mod">
           <ac:chgData name="城谷 匠" userId="afbae57c-d4ca-4e58-bc9a-6f765e208d89" providerId="ADAL" clId="{FD963559-32B2-43B7-8F97-A1E47AC731FA}" dt="2026-05-27T07:26:54.810" v="0"/>
           <ac:cxnSpMkLst>
@@ -209,6 +338,37 @@
             <ac:cxnSpMk id="26" creationId="{27EBF9F0-3703-047C-04CB-8AD93AF39BD2}"/>
           </ac:cxnSpMkLst>
         </pc:cxnChg>
+        <pc:cxnChg chg="mod">
+          <ac:chgData name="城谷 匠" userId="afbae57c-d4ca-4e58-bc9a-6f765e208d89" providerId="ADAL" clId="{FD963559-32B2-43B7-8F97-A1E47AC731FA}" dt="2026-05-27T10:19:25.922" v="98" actId="14100"/>
+          <ac:cxnSpMkLst>
+            <pc:docMk/>
+            <pc:sldMk cId="303347138" sldId="256"/>
+            <ac:cxnSpMk id="31" creationId="{F2B7C0C2-A662-CE01-7739-078D34ADE4A5}"/>
+          </ac:cxnSpMkLst>
+        </pc:cxnChg>
+      </pc:sldChg>
+      <pc:sldChg chg="modSp new mod ord">
+        <pc:chgData name="城谷 匠" userId="afbae57c-d4ca-4e58-bc9a-6f765e208d89" providerId="ADAL" clId="{FD963559-32B2-43B7-8F97-A1E47AC731FA}" dt="2026-05-27T08:33:03.923" v="89"/>
+        <pc:sldMkLst>
+          <pc:docMk/>
+          <pc:sldMk cId="1316732268" sldId="257"/>
+        </pc:sldMkLst>
+        <pc:spChg chg="mod">
+          <ac:chgData name="城谷 匠" userId="afbae57c-d4ca-4e58-bc9a-6f765e208d89" providerId="ADAL" clId="{FD963559-32B2-43B7-8F97-A1E47AC731FA}" dt="2026-05-27T08:32:50.538" v="38" actId="20577"/>
+          <ac:spMkLst>
+            <pc:docMk/>
+            <pc:sldMk cId="1316732268" sldId="257"/>
+            <ac:spMk id="2" creationId="{076BCE01-45A0-6F90-0528-1F6EA58649D8}"/>
+          </ac:spMkLst>
+        </pc:spChg>
+        <pc:spChg chg="mod">
+          <ac:chgData name="城谷 匠" userId="afbae57c-d4ca-4e58-bc9a-6f765e208d89" providerId="ADAL" clId="{FD963559-32B2-43B7-8F97-A1E47AC731FA}" dt="2026-05-27T08:33:01.039" v="87" actId="20577"/>
+          <ac:spMkLst>
+            <pc:docMk/>
+            <pc:sldMk cId="1316732268" sldId="257"/>
+            <ac:spMk id="3" creationId="{3B08370A-5776-E9B7-3675-769D946BEF53}"/>
+          </ac:spMkLst>
+        </pc:spChg>
       </pc:sldChg>
     </pc:docChg>
   </pc:docChgLst>
@@ -13357,6 +13517,105 @@
       </p:grpSpPr>
       <p:sp>
         <p:nvSpPr>
+          <p:cNvPr id="2" name="タイトル 1">
+            <a:extLst>
+              <a:ext uri="{FF2B5EF4-FFF2-40B4-BE49-F238E27FC236}">
+                <a16:creationId xmlns:a16="http://schemas.microsoft.com/office/drawing/2014/main" id="{076BCE01-45A0-6F90-0528-1F6EA58649D8}"/>
+              </a:ext>
+            </a:extLst>
+          </p:cNvPr>
+          <p:cNvSpPr>
+            <a:spLocks noGrp="1"/>
+          </p:cNvSpPr>
+          <p:nvPr>
+            <p:ph type="ctrTitle"/>
+          </p:nvPr>
+        </p:nvSpPr>
+        <p:spPr/>
+        <p:txBody>
+          <a:bodyPr/>
+          <a:lstStyle/>
+          <a:p>
+            <a:r>
+              <a:rPr kumimoji="1" lang="en-US" altLang="ja-JP" dirty="0" err="1"/>
+              <a:t>ImageFlux</a:t>
+            </a:r>
+            <a:r>
+              <a:rPr kumimoji="1" lang="en-US" altLang="ja-JP" dirty="0"/>
+              <a:t> Live Streaming</a:t>
+            </a:r>
+            <a:r>
+              <a:rPr kumimoji="1" lang="ja-JP" altLang="en-US" dirty="0"/>
+              <a:t>デモサイト</a:t>
+            </a:r>
+          </a:p>
+        </p:txBody>
+      </p:sp>
+      <p:sp>
+        <p:nvSpPr>
+          <p:cNvPr id="3" name="字幕 2">
+            <a:extLst>
+              <a:ext uri="{FF2B5EF4-FFF2-40B4-BE49-F238E27FC236}">
+                <a16:creationId xmlns:a16="http://schemas.microsoft.com/office/drawing/2014/main" id="{3B08370A-5776-E9B7-3675-769D946BEF53}"/>
+              </a:ext>
+            </a:extLst>
+          </p:cNvPr>
+          <p:cNvSpPr>
+            <a:spLocks noGrp="1"/>
+          </p:cNvSpPr>
+          <p:nvPr>
+            <p:ph type="subTitle" idx="1"/>
+          </p:nvPr>
+        </p:nvSpPr>
+        <p:spPr/>
+        <p:txBody>
+          <a:bodyPr/>
+          <a:lstStyle/>
+          <a:p>
+            <a:r>
+              <a:rPr lang="en-US" altLang="ja-JP" dirty="0"/>
+              <a:t>on </a:t>
+            </a:r>
+            <a:r>
+              <a:rPr lang="ja-JP" altLang="en-US" dirty="0"/>
+              <a:t>さくらのクラウド</a:t>
+            </a:r>
+            <a:endParaRPr kumimoji="1" lang="ja-JP" altLang="en-US" dirty="0"/>
+          </a:p>
+        </p:txBody>
+      </p:sp>
+    </p:spTree>
+    <p:extLst>
+      <p:ext uri="{BB962C8B-B14F-4D97-AF65-F5344CB8AC3E}">
+        <p14:creationId xmlns:p14="http://schemas.microsoft.com/office/powerpoint/2010/main" val="1316732268"/>
+      </p:ext>
+    </p:extLst>
+  </p:cSld>
+  <p:clrMapOvr>
+    <a:masterClrMapping/>
+  </p:clrMapOvr>
+</p:sld>
+</file>
+
+<file path=ppt/slides/slide2.xml><?xml version="1.0" encoding="utf-8"?>
+<p:sld xmlns:a="http://schemas.openxmlformats.org/drawingml/2006/main" xmlns:r="http://schemas.openxmlformats.org/officeDocument/2006/relationships" xmlns:p="http://schemas.openxmlformats.org/presentationml/2006/main">
+  <p:cSld>
+    <p:spTree>
+      <p:nvGrpSpPr>
+        <p:cNvPr id="1" name=""/>
+        <p:cNvGrpSpPr/>
+        <p:nvPr/>
+      </p:nvGrpSpPr>
+      <p:grpSpPr>
+        <a:xfrm>
+          <a:off x="0" y="0"/>
+          <a:ext cx="0" cy="0"/>
+          <a:chOff x="0" y="0"/>
+          <a:chExt cx="0" cy="0"/>
+        </a:xfrm>
+      </p:grpSpPr>
+      <p:sp>
+        <p:nvSpPr>
           <p:cNvPr id="2" name="テキスト プレースホルダー 1">
             <a:extLst>
               <a:ext uri="{FF2B5EF4-FFF2-40B4-BE49-F238E27FC236}">
@@ -13566,10 +13825,10 @@
       </p:sp>
       <p:grpSp>
         <p:nvGrpSpPr>
-          <p:cNvPr id="52" name="グループ化 51">
+          <p:cNvPr id="16" name="グループ化 15">
             <a:extLst>
               <a:ext uri="{FF2B5EF4-FFF2-40B4-BE49-F238E27FC236}">
-                <a16:creationId xmlns:a16="http://schemas.microsoft.com/office/drawing/2014/main" id="{F653BCFF-883C-0F3D-9576-480464B72390}"/>
+                <a16:creationId xmlns:a16="http://schemas.microsoft.com/office/drawing/2014/main" id="{E05F19AE-F27E-4434-8598-0AA2D7667875}"/>
               </a:ext>
             </a:extLst>
           </p:cNvPr>
@@ -13580,7 +13839,7 @@
           <a:xfrm>
             <a:off x="14023363" y="2937466"/>
             <a:ext cx="7560000" cy="7841067"/>
-            <a:chOff x="12191206" y="4371966"/>
+            <a:chOff x="14023363" y="2937466"/>
             <a:chExt cx="7560000" cy="7841067"/>
           </a:xfrm>
         </p:grpSpPr>
@@ -13602,7 +13861,7 @@
           </p:nvCxnSpPr>
           <p:spPr>
             <a:xfrm flipV="1">
-              <a:off x="15785581" y="8691966"/>
+              <a:off x="17617738" y="7257466"/>
               <a:ext cx="5625" cy="1434736"/>
             </a:xfrm>
             <a:prstGeom prst="straightConnector1">
@@ -13659,43 +13918,7 @@
           </p:blipFill>
           <p:spPr>
             <a:xfrm>
-              <a:off x="12191206" y="5811966"/>
-              <a:ext cx="1440000" cy="1440000"/>
-            </a:xfrm>
-            <a:prstGeom prst="rect">
-              <a:avLst/>
-            </a:prstGeom>
-          </p:spPr>
-        </p:pic>
-        <p:pic>
-          <p:nvPicPr>
-            <p:cNvPr id="5" name="グラフィックス 4">
-              <a:extLst>
-                <a:ext uri="{FF2B5EF4-FFF2-40B4-BE49-F238E27FC236}">
-                  <a16:creationId xmlns:a16="http://schemas.microsoft.com/office/drawing/2014/main" id="{C8EBA0E5-D1C8-7D5F-D777-BDC1D6523F52}"/>
-                </a:ext>
-              </a:extLst>
-            </p:cNvPr>
-            <p:cNvPicPr>
-              <a:picLocks noChangeAspect="1"/>
-            </p:cNvPicPr>
-            <p:nvPr/>
-          </p:nvPicPr>
-          <p:blipFill>
-            <a:blip>
-              <a:extLst>
-                <a:ext uri="{96DAC541-7B7A-43D3-8B79-37D633B846F1}">
-                  <asvg:svgBlip xmlns:asvg="http://schemas.microsoft.com/office/drawing/2016/SVG/main" r:embed="rId3"/>
-                </a:ext>
-              </a:extLst>
-            </a:blip>
-            <a:stretch>
-              <a:fillRect/>
-            </a:stretch>
-          </p:blipFill>
-          <p:spPr>
-            <a:xfrm>
-              <a:off x="15071206" y="4371966"/>
+              <a:off x="14023363" y="4377466"/>
               <a:ext cx="1440000" cy="1440000"/>
             </a:xfrm>
             <a:prstGeom prst="rect">
@@ -13718,14 +13941,14 @@
             <p:nvPr/>
           </p:nvPicPr>
           <p:blipFill>
-            <a:blip r:embed="rId4"/>
+            <a:blip r:embed="rId3"/>
             <a:stretch>
               <a:fillRect/>
             </a:stretch>
           </p:blipFill>
           <p:spPr>
             <a:xfrm>
-              <a:off x="15071206" y="7251966"/>
+              <a:off x="16903363" y="5817466"/>
               <a:ext cx="1440000" cy="1440000"/>
             </a:xfrm>
             <a:prstGeom prst="rect">
@@ -13751,7 +13974,7 @@
             <a:blip>
               <a:extLst>
                 <a:ext uri="{96DAC541-7B7A-43D3-8B79-37D633B846F1}">
-                  <asvg:svgBlip xmlns:asvg="http://schemas.microsoft.com/office/drawing/2016/SVG/main" r:embed="rId5"/>
+                  <asvg:svgBlip xmlns:asvg="http://schemas.microsoft.com/office/drawing/2016/SVG/main" r:embed="rId4"/>
                 </a:ext>
               </a:extLst>
             </a:blip>
@@ -13761,7 +13984,7 @@
           </p:blipFill>
           <p:spPr>
             <a:xfrm>
-              <a:off x="17951206" y="7324952"/>
+              <a:off x="19783363" y="5890452"/>
               <a:ext cx="1440000" cy="1294027"/>
             </a:xfrm>
             <a:prstGeom prst="rect">
@@ -13787,7 +14010,7 @@
             <a:blip>
               <a:extLst>
                 <a:ext uri="{96DAC541-7B7A-43D3-8B79-37D633B846F1}">
-                  <asvg:svgBlip xmlns:asvg="http://schemas.microsoft.com/office/drawing/2016/SVG/main" r:embed="rId6"/>
+                  <asvg:svgBlip xmlns:asvg="http://schemas.microsoft.com/office/drawing/2016/SVG/main" r:embed="rId5"/>
                 </a:ext>
               </a:extLst>
             </a:blip>
@@ -13797,7 +14020,7 @@
           </p:blipFill>
           <p:spPr>
             <a:xfrm>
-              <a:off x="17951206" y="4371966"/>
+              <a:off x="19783363" y="2937466"/>
               <a:ext cx="1440000" cy="1440000"/>
             </a:xfrm>
             <a:prstGeom prst="rect">
@@ -13819,7 +14042,7 @@
           </p:nvSpPr>
           <p:spPr>
             <a:xfrm>
-              <a:off x="14705581" y="5953568"/>
+              <a:off x="16537738" y="4519068"/>
               <a:ext cx="2160000" cy="646331"/>
             </a:xfrm>
             <a:prstGeom prst="rect">
@@ -13862,7 +14085,7 @@
           </p:nvSpPr>
           <p:spPr>
             <a:xfrm>
-              <a:off x="17591206" y="5953567"/>
+              <a:off x="19423363" y="4519067"/>
               <a:ext cx="2160000" cy="646331"/>
             </a:xfrm>
             <a:prstGeom prst="rect">
@@ -13905,7 +14128,7 @@
           </p:nvSpPr>
           <p:spPr>
             <a:xfrm>
-              <a:off x="14705581" y="6876899"/>
+              <a:off x="16537738" y="5442399"/>
               <a:ext cx="2160000" cy="369332"/>
             </a:xfrm>
             <a:prstGeom prst="rect">
@@ -13945,7 +14168,7 @@
           </p:nvSpPr>
           <p:spPr>
             <a:xfrm>
-              <a:off x="17591206" y="8697702"/>
+              <a:off x="19423363" y="7263202"/>
               <a:ext cx="2160000" cy="646331"/>
             </a:xfrm>
             <a:prstGeom prst="rect">
@@ -13985,14 +14208,16 @@
               </a:extLst>
             </p:cNvPr>
             <p:cNvCxnSpPr>
+              <a:cxnSpLocks/>
+              <a:stCxn id="4" idx="3"/>
               <a:endCxn id="17" idx="1"/>
             </p:cNvCxnSpPr>
             <p:nvPr/>
           </p:nvCxnSpPr>
           <p:spPr>
-            <a:xfrm>
-              <a:off x="16511206" y="5091966"/>
-              <a:ext cx="1440000" cy="0"/>
+            <a:xfrm flipV="1">
+              <a:off x="18343363" y="3657466"/>
+              <a:ext cx="1440000" cy="3463"/>
             </a:xfrm>
             <a:prstGeom prst="straightConnector1">
               <a:avLst/>
@@ -14036,7 +14261,7 @@
           </p:nvCxnSpPr>
           <p:spPr>
             <a:xfrm>
-              <a:off x="16511206" y="7971966"/>
+              <a:off x="18343363" y="6537466"/>
               <a:ext cx="1440000" cy="0"/>
             </a:xfrm>
             <a:prstGeom prst="straightConnector1">
@@ -14077,14 +14302,14 @@
             <p:cNvCxnSpPr>
               <a:cxnSpLocks/>
               <a:stCxn id="23" idx="3"/>
-              <a:endCxn id="5" idx="1"/>
+              <a:endCxn id="4" idx="1"/>
             </p:cNvCxnSpPr>
             <p:nvPr/>
           </p:nvCxnSpPr>
           <p:spPr>
             <a:xfrm flipV="1">
-              <a:off x="13631206" y="5091966"/>
-              <a:ext cx="1440000" cy="1440000"/>
+              <a:off x="15463363" y="3660929"/>
+              <a:ext cx="1440000" cy="1436537"/>
             </a:xfrm>
             <a:prstGeom prst="bentConnector3">
               <a:avLst>
@@ -14131,7 +14356,7 @@
           </p:nvCxnSpPr>
           <p:spPr>
             <a:xfrm>
-              <a:off x="13631206" y="6531966"/>
+              <a:off x="15463363" y="5097466"/>
               <a:ext cx="1440000" cy="1440000"/>
             </a:xfrm>
             <a:prstGeom prst="bentConnector3">
@@ -14176,14 +14401,14 @@
             <p:nvPr/>
           </p:nvPicPr>
           <p:blipFill>
-            <a:blip r:embed="rId7"/>
+            <a:blip r:embed="rId6"/>
             <a:stretch>
               <a:fillRect/>
             </a:stretch>
           </p:blipFill>
           <p:spPr>
             <a:xfrm>
-              <a:off x="15065581" y="10126702"/>
+              <a:off x="16897738" y="8692202"/>
               <a:ext cx="1440000" cy="1440000"/>
             </a:xfrm>
             <a:prstGeom prst="rect">
@@ -14205,7 +14430,7 @@
           </p:nvSpPr>
           <p:spPr>
             <a:xfrm>
-              <a:off x="14705581" y="11566702"/>
+              <a:off x="16537738" y="10132202"/>
               <a:ext cx="2160000" cy="646331"/>
             </a:xfrm>
             <a:prstGeom prst="rect">
@@ -14234,6 +14459,42 @@
             </a:p>
           </p:txBody>
         </p:sp>
+        <p:pic>
+          <p:nvPicPr>
+            <p:cNvPr id="4" name="グラフィックス 3">
+              <a:extLst>
+                <a:ext uri="{FF2B5EF4-FFF2-40B4-BE49-F238E27FC236}">
+                  <a16:creationId xmlns:a16="http://schemas.microsoft.com/office/drawing/2014/main" id="{9F7FB5C9-646D-24C3-F89C-E0724B2A0E54}"/>
+                </a:ext>
+              </a:extLst>
+            </p:cNvPr>
+            <p:cNvPicPr>
+              <a:picLocks noChangeAspect="1"/>
+            </p:cNvPicPr>
+            <p:nvPr/>
+          </p:nvPicPr>
+          <p:blipFill>
+            <a:blip>
+              <a:extLst>
+                <a:ext uri="{96DAC541-7B7A-43D3-8B79-37D633B846F1}">
+                  <asvg:svgBlip xmlns:asvg="http://schemas.microsoft.com/office/drawing/2016/SVG/main" r:embed="rId7"/>
+                </a:ext>
+              </a:extLst>
+            </a:blip>
+            <a:stretch>
+              <a:fillRect/>
+            </a:stretch>
+          </p:blipFill>
+          <p:spPr>
+            <a:xfrm>
+              <a:off x="16903363" y="2940929"/>
+              <a:ext cx="1440000" cy="1440000"/>
+            </a:xfrm>
+            <a:prstGeom prst="rect">
+              <a:avLst/>
+            </a:prstGeom>
+          </p:spPr>
+        </p:pic>
       </p:grpSp>
     </p:spTree>
     <p:extLst>
